--- a/output/pptx/ocean-proposal-deck-reference.pptx
+++ b/output/pptx/ocean-proposal-deck-reference.pptx
@@ -2273,7 +2273,7 @@
         </p:nvSpPr>
         <p:spPr>
           <a:xfrm>
-            <a:off x="711200" y="3017520"/>
+            <a:off x="711200" y="2761488"/>
             <a:ext cx="10769295" cy="228600"/>
           </a:xfrm>
           <a:prstGeom prst="rect">
